--- a/metro/metro-s04-testimonial.pptx
+++ b/metro/metro-s04-testimonial.pptx
@@ -3646,9 +3646,9 @@
                 <a:solidFill>
                   <a:srgbClr val="FFFFFF"/>
                 </a:solidFill>
-                <a:latin typeface="Space Grotesk"/>
-                <a:ea typeface="Space Grotesk"/>
-                <a:cs typeface="Space Grotesk"/>
+                <a:latin typeface="HK Grotesk"/>
+                <a:ea typeface="HK Grotesk"/>
+                <a:cs typeface="HK Grotesk"/>
               </a:rPr>
               <a:t>NO</a:t>
             </a:r>
@@ -3716,9 +3716,9 @@
                 <a:solidFill>
                   <a:srgbClr val="2D5BE3"/>
                 </a:solidFill>
-                <a:latin typeface="Space Grotesk"/>
-                <a:ea typeface="Space Grotesk"/>
-                <a:cs typeface="Space Grotesk"/>
+                <a:latin typeface="HK Grotesk"/>
+                <a:ea typeface="HK Grotesk"/>
+                <a:cs typeface="HK Grotesk"/>
               </a:rPr>
               <a:t>◆ ◆ ◆ ◆ ◆</a:t>
             </a:r>
@@ -3755,9 +3755,9 @@
                 <a:solidFill>
                   <a:srgbClr val="2D5BE3"/>
                 </a:solidFill>
-                <a:latin typeface="Space Grotesk"/>
-                <a:ea typeface="Space Grotesk"/>
-                <a:cs typeface="Space Grotesk"/>
+                <a:latin typeface="HK Grotesk"/>
+                <a:ea typeface="HK Grotesk"/>
+                <a:cs typeface="HK Grotesk"/>
               </a:rPr>
               <a:t>“</a:t>
             </a:r>
@@ -3794,9 +3794,9 @@
                 <a:solidFill>
                   <a:srgbClr val="FFFFFF"/>
                 </a:solidFill>
-                <a:latin typeface="Space Grotesk"/>
-                <a:ea typeface="Space Grotesk"/>
-                <a:cs typeface="Space Grotesk"/>
+                <a:latin typeface="HK Grotesk"/>
+                <a:ea typeface="HK Grotesk"/>
+                <a:cs typeface="HK Grotesk"/>
               </a:rPr>
               <a:t>Calm, sharp, and completely on our side from the first showing to the closing table.</a:t>
             </a:r>
@@ -3829,9 +3829,9 @@
                 <a:solidFill>
                   <a:srgbClr val="FFFFFF"/>
                 </a:solidFill>
-                <a:latin typeface="Space Grotesk"/>
-                <a:ea typeface="Space Grotesk"/>
-                <a:cs typeface="Space Grotesk"/>
+                <a:latin typeface="HK Grotesk"/>
+                <a:ea typeface="HK Grotesk"/>
+                <a:cs typeface="HK Grotesk"/>
               </a:rPr>
               <a:t>Priya &amp; Tom L.</a:t>
             </a:r>
@@ -3899,9 +3899,9 @@
                 <a:solidFill>
                   <a:srgbClr val="FFFFFF"/>
                 </a:solidFill>
-                <a:latin typeface="Space Grotesk"/>
-                <a:ea typeface="Space Grotesk"/>
-                <a:cs typeface="Space Grotesk"/>
+                <a:latin typeface="HK Grotesk"/>
+                <a:ea typeface="HK Grotesk"/>
+                <a:cs typeface="HK Grotesk"/>
               </a:rPr>
               <a:t>Read more reviews</a:t>
             </a:r>
@@ -3934,9 +3934,9 @@
                 <a:solidFill>
                   <a:srgbClr val="2D5BE3"/>
                 </a:solidFill>
-                <a:latin typeface="Space Grotesk"/>
-                <a:ea typeface="Space Grotesk"/>
-                <a:cs typeface="Space Grotesk"/>
+                <a:latin typeface="HK Grotesk"/>
+                <a:ea typeface="HK Grotesk"/>
+                <a:cs typeface="HK Grotesk"/>
               </a:rPr>
               <a:t>↗</a:t>
             </a:r>

--- a/metro/metro-s04-testimonial.pptx
+++ b/metro/metro-s04-testimonial.pptx
@@ -3316,7 +3316,7 @@
         </p:nvSpPr>
         <p:spPr>
           <a:xfrm>
-            <a:off x="3731865" y="7988498"/>
+            <a:off x="3401913" y="8078986"/>
             <a:ext cx="514350" cy="9525"/>
           </a:xfrm>
           <a:prstGeom prst="rect">
@@ -3360,7 +3360,7 @@
         </p:nvSpPr>
         <p:spPr>
           <a:xfrm>
-            <a:off x="6040785" y="7988498"/>
+            <a:off x="6370588" y="8078986"/>
             <a:ext cx="514350" cy="9525"/>
           </a:xfrm>
           <a:prstGeom prst="rect">
@@ -3404,7 +3404,7 @@
         </p:nvSpPr>
         <p:spPr>
           <a:xfrm>
-            <a:off x="762000" y="15735300"/>
+            <a:off x="762000" y="15525750"/>
             <a:ext cx="8763000" cy="9525"/>
           </a:xfrm>
           <a:prstGeom prst="rect">
@@ -3492,8 +3492,8 @@
         </p:nvSpPr>
         <p:spPr>
           <a:xfrm>
-            <a:off x="762000" y="15735300"/>
-            <a:ext cx="9525" cy="647700"/>
+            <a:off x="762000" y="15525750"/>
+            <a:ext cx="9525" cy="857250"/>
           </a:xfrm>
           <a:prstGeom prst="rect">
             <a:avLst/>
@@ -3536,8 +3536,8 @@
         </p:nvSpPr>
         <p:spPr>
           <a:xfrm>
-            <a:off x="9515475" y="15735300"/>
-            <a:ext cx="9525" cy="647700"/>
+            <a:off x="9515475" y="15525750"/>
+            <a:ext cx="9525" cy="857250"/>
           </a:xfrm>
           <a:prstGeom prst="rect">
             <a:avLst/>
@@ -3580,7 +3580,7 @@
         </p:nvSpPr>
         <p:spPr>
           <a:xfrm>
-            <a:off x="1024416" y="16012004"/>
+            <a:off x="1081566" y="15907229"/>
             <a:ext cx="94293" cy="94292"/>
           </a:xfrm>
           <a:prstGeom prst="rect">
@@ -3646,9 +3646,9 @@
                 <a:solidFill>
                   <a:srgbClr val="FFFFFF"/>
                 </a:solidFill>
-                <a:latin typeface="HK Grotesk"/>
-                <a:ea typeface="HK Grotesk"/>
-                <a:cs typeface="HK Grotesk"/>
+                <a:latin typeface="Space Grotesk"/>
+                <a:ea typeface="Space Grotesk"/>
+                <a:cs typeface="Space Grotesk"/>
               </a:rPr>
               <a:t>NO</a:t>
             </a:r>
@@ -3663,8 +3663,8 @@
         </p:nvSpPr>
         <p:spPr>
           <a:xfrm>
-            <a:off x="7592764" y="938212"/>
-            <a:ext cx="3472577" cy="104775"/>
+            <a:off x="6433542" y="900112"/>
+            <a:ext cx="5327332" cy="180975"/>
           </a:xfrm>
           <a:prstGeom prst="rect">
             <a:avLst/>
@@ -3677,7 +3677,7 @@
           <a:p>
             <a:pPr algn="l"/>
             <a:r>
-              <a:rPr sz="750" i="0" b="0" spc="240">
+              <a:rPr sz="1200" i="0" b="0" spc="384">
                 <a:solidFill>
                   <a:srgbClr val="A1A2A3"/>
                 </a:solidFill>
@@ -3716,9 +3716,9 @@
                 <a:solidFill>
                   <a:srgbClr val="2D5BE3"/>
                 </a:solidFill>
-                <a:latin typeface="HK Grotesk"/>
-                <a:ea typeface="HK Grotesk"/>
-                <a:cs typeface="HK Grotesk"/>
+                <a:latin typeface="Space Grotesk"/>
+                <a:ea typeface="Space Grotesk"/>
+                <a:cs typeface="Space Grotesk"/>
               </a:rPr>
               <a:t>◆ ◆ ◆ ◆ ◆</a:t>
             </a:r>
@@ -3755,9 +3755,9 @@
                 <a:solidFill>
                   <a:srgbClr val="2D5BE3"/>
                 </a:solidFill>
-                <a:latin typeface="HK Grotesk"/>
-                <a:ea typeface="HK Grotesk"/>
-                <a:cs typeface="HK Grotesk"/>
+                <a:latin typeface="Space Grotesk"/>
+                <a:ea typeface="Space Grotesk"/>
+                <a:cs typeface="Space Grotesk"/>
               </a:rPr>
               <a:t>“</a:t>
             </a:r>
@@ -3794,9 +3794,9 @@
                 <a:solidFill>
                   <a:srgbClr val="FFFFFF"/>
                 </a:solidFill>
-                <a:latin typeface="HK Grotesk"/>
-                <a:ea typeface="HK Grotesk"/>
-                <a:cs typeface="HK Grotesk"/>
+                <a:latin typeface="Space Grotesk"/>
+                <a:ea typeface="Space Grotesk"/>
+                <a:cs typeface="Space Grotesk"/>
               </a:rPr>
               <a:t>Calm, sharp, and completely on our side from the first showing to the closing table.</a:t>
             </a:r>
@@ -3811,8 +3811,8 @@
         </p:nvSpPr>
         <p:spPr>
           <a:xfrm>
-            <a:off x="3791664" y="7869436"/>
-            <a:ext cx="2703671" cy="247650"/>
+            <a:off x="3263786" y="7907536"/>
+            <a:ext cx="3759279" cy="352425"/>
           </a:xfrm>
           <a:prstGeom prst="rect">
             <a:avLst/>
@@ -3825,13 +3825,13 @@
           <a:p>
             <a:pPr algn="ctr"/>
             <a:r>
-              <a:rPr sz="1650" i="0" b="1">
+              <a:rPr sz="2400" i="0" b="1">
                 <a:solidFill>
                   <a:srgbClr val="FFFFFF"/>
                 </a:solidFill>
-                <a:latin typeface="HK Grotesk"/>
-                <a:ea typeface="HK Grotesk"/>
-                <a:cs typeface="HK Grotesk"/>
+                <a:latin typeface="Space Grotesk"/>
+                <a:ea typeface="Space Grotesk"/>
+                <a:cs typeface="Space Grotesk"/>
               </a:rPr>
               <a:t>Priya &amp; Tom L.</a:t>
             </a:r>
@@ -3846,8 +3846,8 @@
         </p:nvSpPr>
         <p:spPr>
           <a:xfrm>
-            <a:off x="-2057400" y="8250436"/>
-            <a:ext cx="14401800" cy="104775"/>
+            <a:off x="-2057400" y="8412361"/>
+            <a:ext cx="14401800" cy="180975"/>
           </a:xfrm>
           <a:prstGeom prst="rect">
             <a:avLst/>
@@ -3860,7 +3860,7 @@
           <a:p>
             <a:pPr algn="ctr"/>
             <a:r>
-              <a:rPr sz="750" i="0" b="0" spc="240">
+              <a:rPr sz="1200" i="0" b="0" spc="384">
                 <a:solidFill>
                   <a:srgbClr val="B8B9BA"/>
                 </a:solidFill>
@@ -3881,8 +3881,8 @@
         </p:nvSpPr>
         <p:spPr>
           <a:xfrm>
-            <a:off x="1238250" y="15978188"/>
-            <a:ext cx="2542699" cy="161925"/>
+            <a:off x="1314450" y="15825788"/>
+            <a:ext cx="3695462" cy="257175"/>
           </a:xfrm>
           <a:prstGeom prst="rect">
             <a:avLst/>
@@ -3895,13 +3895,13 @@
           <a:p>
             <a:pPr algn="l"/>
             <a:r>
-              <a:rPr sz="1125" i="0" b="1" spc="22">
+              <a:rPr sz="1725" i="0" b="1" spc="34">
                 <a:solidFill>
                   <a:srgbClr val="FFFFFF"/>
                 </a:solidFill>
-                <a:latin typeface="HK Grotesk"/>
-                <a:ea typeface="HK Grotesk"/>
-                <a:cs typeface="HK Grotesk"/>
+                <a:latin typeface="Space Grotesk"/>
+                <a:ea typeface="Space Grotesk"/>
+                <a:cs typeface="Space Grotesk"/>
               </a:rPr>
               <a:t>Read more reviews</a:t>
             </a:r>
@@ -3916,8 +3916,8 @@
         </p:nvSpPr>
         <p:spPr>
           <a:xfrm>
-            <a:off x="9105900" y="15954375"/>
-            <a:ext cx="609600" cy="209550"/>
+            <a:off x="9001125" y="15821025"/>
+            <a:ext cx="685800" cy="266700"/>
           </a:xfrm>
           <a:prstGeom prst="rect">
             <a:avLst/>
@@ -3930,13 +3930,13 @@
           <a:p>
             <a:pPr algn="l"/>
             <a:r>
-              <a:rPr sz="1350" i="0" b="0">
+              <a:rPr sz="1800" i="0" b="0">
                 <a:solidFill>
                   <a:srgbClr val="2D5BE3"/>
                 </a:solidFill>
-                <a:latin typeface="HK Grotesk"/>
-                <a:ea typeface="HK Grotesk"/>
-                <a:cs typeface="HK Grotesk"/>
+                <a:latin typeface="Space Grotesk"/>
+                <a:ea typeface="Space Grotesk"/>
+                <a:cs typeface="Space Grotesk"/>
               </a:rPr>
               <a:t>↗</a:t>
             </a:r>
@@ -3951,8 +3951,8 @@
         </p:nvSpPr>
         <p:spPr>
           <a:xfrm>
-            <a:off x="2557031" y="17297400"/>
-            <a:ext cx="5172789" cy="123825"/>
+            <a:off x="1468041" y="17249775"/>
+            <a:ext cx="7350919" cy="180975"/>
           </a:xfrm>
           <a:prstGeom prst="rect">
             <a:avLst/>
@@ -3965,7 +3965,7 @@
           <a:p>
             <a:pPr algn="ctr"/>
             <a:r>
-              <a:rPr sz="825" i="0" b="0" spc="264">
+              <a:rPr sz="1200" i="0" b="0" spc="384">
                 <a:solidFill>
                   <a:srgbClr val="B8B9BA"/>
                 </a:solidFill>

--- a/metro/metro-s04-testimonial.pptx
+++ b/metro/metro-s04-testimonial.pptx
@@ -3404,7 +3404,7 @@
         </p:nvSpPr>
         <p:spPr>
           <a:xfrm>
-            <a:off x="762000" y="15525750"/>
+            <a:off x="762000" y="15478125"/>
             <a:ext cx="8763000" cy="9525"/>
           </a:xfrm>
           <a:prstGeom prst="rect">
@@ -3492,8 +3492,8 @@
         </p:nvSpPr>
         <p:spPr>
           <a:xfrm>
-            <a:off x="762000" y="15525750"/>
-            <a:ext cx="9525" cy="857250"/>
+            <a:off x="762000" y="15478125"/>
+            <a:ext cx="9525" cy="904875"/>
           </a:xfrm>
           <a:prstGeom prst="rect">
             <a:avLst/>
@@ -3536,8 +3536,8 @@
         </p:nvSpPr>
         <p:spPr>
           <a:xfrm>
-            <a:off x="9515475" y="15525750"/>
-            <a:ext cx="9525" cy="857250"/>
+            <a:off x="9515475" y="15478125"/>
+            <a:ext cx="9525" cy="904875"/>
           </a:xfrm>
           <a:prstGeom prst="rect">
             <a:avLst/>
@@ -3580,7 +3580,7 @@
         </p:nvSpPr>
         <p:spPr>
           <a:xfrm>
-            <a:off x="1081566" y="15907229"/>
+            <a:off x="1081566" y="15883417"/>
             <a:ext cx="94293" cy="94292"/>
           </a:xfrm>
           <a:prstGeom prst="rect">
@@ -3624,8 +3624,8 @@
         </p:nvSpPr>
         <p:spPr>
           <a:xfrm>
-            <a:off x="873175" y="914400"/>
-            <a:ext cx="756523" cy="152400"/>
+            <a:off x="851148" y="900112"/>
+            <a:ext cx="827008" cy="180975"/>
           </a:xfrm>
           <a:prstGeom prst="rect">
             <a:avLst/>
@@ -3642,7 +3642,7 @@
               </a:lnSpc>
             </a:pPr>
             <a:r>
-              <a:rPr sz="1200" i="0" b="1" spc="24">
+              <a:rPr sz="1425" i="0" b="1" spc="28">
                 <a:solidFill>
                   <a:srgbClr val="FFFFFF"/>
                 </a:solidFill>
@@ -3663,8 +3663,8 @@
         </p:nvSpPr>
         <p:spPr>
           <a:xfrm>
-            <a:off x="6433542" y="900112"/>
-            <a:ext cx="5327332" cy="180975"/>
+            <a:off x="5853857" y="885825"/>
+            <a:ext cx="6254829" cy="209550"/>
           </a:xfrm>
           <a:prstGeom prst="rect">
             <a:avLst/>
@@ -3677,7 +3677,7 @@
           <a:p>
             <a:pPr algn="l"/>
             <a:r>
-              <a:rPr sz="1200" i="0" b="0" spc="384">
+              <a:rPr sz="1425" i="0" b="0" spc="456">
                 <a:solidFill>
                   <a:srgbClr val="A1A2A3"/>
                 </a:solidFill>
@@ -3847,7 +3847,7 @@
         <p:spPr>
           <a:xfrm>
             <a:off x="-2057400" y="8412361"/>
-            <a:ext cx="14401800" cy="180975"/>
+            <a:ext cx="14401800" cy="209550"/>
           </a:xfrm>
           <a:prstGeom prst="rect">
             <a:avLst/>
@@ -3860,7 +3860,7 @@
           <a:p>
             <a:pPr algn="ctr"/>
             <a:r>
-              <a:rPr sz="1200" i="0" b="0" spc="384">
+              <a:rPr sz="1425" i="0" b="0" spc="456">
                 <a:solidFill>
                   <a:srgbClr val="B8B9BA"/>
                 </a:solidFill>
@@ -3881,8 +3881,8 @@
         </p:nvSpPr>
         <p:spPr>
           <a:xfrm>
-            <a:off x="1314450" y="15825788"/>
-            <a:ext cx="3695462" cy="257175"/>
+            <a:off x="1314450" y="15782925"/>
+            <a:ext cx="4271962" cy="295275"/>
           </a:xfrm>
           <a:prstGeom prst="rect">
             <a:avLst/>
@@ -3895,7 +3895,7 @@
           <a:p>
             <a:pPr algn="l"/>
             <a:r>
-              <a:rPr sz="1725" i="0" b="1" spc="34">
+              <a:rPr sz="2025" i="0" b="1" spc="40">
                 <a:solidFill>
                   <a:srgbClr val="FFFFFF"/>
                 </a:solidFill>
@@ -3916,8 +3916,8 @@
         </p:nvSpPr>
         <p:spPr>
           <a:xfrm>
-            <a:off x="9001125" y="15821025"/>
-            <a:ext cx="685800" cy="266700"/>
+            <a:off x="8972550" y="15773400"/>
+            <a:ext cx="731520" cy="314325"/>
           </a:xfrm>
           <a:prstGeom prst="rect">
             <a:avLst/>
@@ -3930,7 +3930,7 @@
           <a:p>
             <a:pPr algn="l"/>
             <a:r>
-              <a:rPr sz="1800" i="0" b="0">
+              <a:rPr sz="2100" i="0" b="0">
                 <a:solidFill>
                   <a:srgbClr val="2D5BE3"/>
                 </a:solidFill>
@@ -3951,8 +3951,8 @@
         </p:nvSpPr>
         <p:spPr>
           <a:xfrm>
-            <a:off x="1468041" y="17249775"/>
-            <a:ext cx="7350919" cy="180975"/>
+            <a:off x="814626" y="17221200"/>
+            <a:ext cx="8657749" cy="209550"/>
           </a:xfrm>
           <a:prstGeom prst="rect">
             <a:avLst/>
@@ -3965,7 +3965,7 @@
           <a:p>
             <a:pPr algn="ctr"/>
             <a:r>
-              <a:rPr sz="1200" i="0" b="0" spc="384">
+              <a:rPr sz="1425" i="0" b="0" spc="456">
                 <a:solidFill>
                   <a:srgbClr val="B8B9BA"/>
                 </a:solidFill>
